--- a/assets/pptx/catalog-784.pptx
+++ b/assets/pptx/catalog-784.pptx
@@ -3270,7 +3270,7 @@
                 <a:ea typeface="Ebrima"/>
                 <a:cs typeface="Ebrima"/>
               </a:rPr>
-              <a:t>ከአጠገቤ ሁሌም ከጐኔ (2x)</a:t>
+              <a:t>ከአጠገቤ ሁሌም ከጐኔ 2x</a:t>
             </a:r>
           </a:p>
         </p:txBody>
@@ -3391,7 +3391,7 @@
                 <a:ea typeface="Ebrima"/>
                 <a:cs typeface="Ebrima"/>
               </a:rPr>
-              <a:t>አሃ ሌላው ነው ትርፍ (2x)</a:t>
+              <a:t>አሃ ሌላው ነው ትርፍ 2x</a:t>
             </a:r>
           </a:p>
         </p:txBody>
@@ -3476,7 +3476,7 @@
                 <a:ea typeface="Ebrima"/>
                 <a:cs typeface="Ebrima"/>
               </a:rPr>
-              <a:t>አንተን ደጅ ልጥና (2x)</a:t>
+              <a:t>አንተን ደጅ ልጥና 2x</a:t>
             </a:r>
           </a:p>
         </p:txBody>
@@ -3664,7 +3664,7 @@
                 <a:ea typeface="Ebrima"/>
                 <a:cs typeface="Ebrima"/>
               </a:rPr>
-              <a:t>አይከጅልም ልቤ ያን ዓለም (3x)</a:t>
+              <a:t>አይከጅልም ልቤ ያን ዓለም 3x</a:t>
             </a:r>
           </a:p>
           <a:p>
@@ -3682,7 +3682,7 @@
                 <a:ea typeface="Ebrima"/>
                 <a:cs typeface="Ebrima"/>
               </a:rPr>
-              <a:t>በዚያ . (1) . የለም (2x)</a:t>
+              <a:t>በዚያ . 1 . የለም 2x</a:t>
             </a:r>
           </a:p>
         </p:txBody>
@@ -3767,7 +3767,7 @@
                 <a:ea typeface="Ebrima"/>
                 <a:cs typeface="Ebrima"/>
               </a:rPr>
-              <a:t>አንተን ደጅ ልጥና (2x)</a:t>
+              <a:t>አንተን ደጅ ልጥና 2x</a:t>
             </a:r>
           </a:p>
         </p:txBody>
@@ -3852,7 +3852,7 @@
                 <a:ea typeface="Ebrima"/>
                 <a:cs typeface="Ebrima"/>
               </a:rPr>
-              <a:t>አሃሃ አግኝቻለሁና እርሱ ነው ወዳጄ (2x)</a:t>
+              <a:t>አሃሃ አግኝቻለሁና እርሱ ነው ወዳጄ 2x</a:t>
             </a:r>
           </a:p>
         </p:txBody>
@@ -3937,7 +3937,7 @@
                 <a:ea typeface="Ebrima"/>
                 <a:cs typeface="Ebrima"/>
               </a:rPr>
-              <a:t>ከአጠገቤ ሁሌም ከጐኔ (2x)</a:t>
+              <a:t>ከአጠገቤ ሁሌም ከጐኔ 2x</a:t>
             </a:r>
           </a:p>
         </p:txBody>
@@ -4058,7 +4058,7 @@
                 <a:ea typeface="Ebrima"/>
                 <a:cs typeface="Ebrima"/>
               </a:rPr>
-              <a:t>አሃ ሌላው ነው ትርፍ (2x)</a:t>
+              <a:t>አሃ ሌላው ነው ትርፍ 2x</a:t>
             </a:r>
           </a:p>
         </p:txBody>
@@ -4143,7 +4143,7 @@
                 <a:ea typeface="Ebrima"/>
                 <a:cs typeface="Ebrima"/>
               </a:rPr>
-              <a:t>ልሂድ አንተን ትቼ (2x)</a:t>
+              <a:t>ልሂድ አንተን ትቼ 2x</a:t>
             </a:r>
           </a:p>
         </p:txBody>
@@ -4385,7 +4385,7 @@
                 <a:ea typeface="Ebrima"/>
                 <a:cs typeface="Ebrima"/>
               </a:rPr>
-              <a:t>አሃ አለሁ ባይ ጐኔ (2x)</a:t>
+              <a:t>አሃ አለሁ ባይ ጐኔ 2x</a:t>
             </a:r>
           </a:p>
         </p:txBody>
